--- a/backend/tests/fixtures/conversation_attachments/valid.pptx
+++ b/backend/tests/fixtures/conversation_attachments/valid.pptx
@@ -1,4 +1,4 @@
 
 <file path=ppt/presentation.xml><?xml version="1.0" encoding="utf-8"?>
-<root/>
+<p:presentation xmlns:p="http://schemas.openxmlformats.org/presentationml/2006/main"/>
 </file>